--- a/final PROJECT PRESENTATION GROUP_13_Updated.pptx
+++ b/final PROJECT PRESENTATION GROUP_13_Updated.pptx
@@ -2534,7 +2534,7 @@
           <a:p>
             <a:fld id="{6AD6EE87-EBD5-4F12-A48A-63ACA297AC8F}" type="datetimeFigureOut">
               <a:rPr lang="en-US" smtClean="0"/>
-              <a:t>4/24/2026</a:t>
+              <a:t>4/25/2026</a:t>
             </a:fld>
             <a:endParaRPr lang="en-US" dirty="0"/>
           </a:p>
@@ -2797,7 +2797,7 @@
           <a:p>
             <a:fld id="{4CD73815-2707-4475-8F1A-B873CB631BB4}" type="datetimeFigureOut">
               <a:rPr lang="en-US" smtClean="0"/>
-              <a:t>4/24/2026</a:t>
+              <a:t>4/25/2026</a:t>
             </a:fld>
             <a:endParaRPr lang="en-US" dirty="0"/>
           </a:p>
@@ -3033,7 +3033,7 @@
           <a:p>
             <a:fld id="{2A4AFB99-0EAB-4182-AFF8-E214C82A68F6}" type="datetimeFigureOut">
               <a:rPr lang="en-US" smtClean="0"/>
-              <a:t>4/24/2026</a:t>
+              <a:t>4/25/2026</a:t>
             </a:fld>
             <a:endParaRPr lang="en-US" dirty="0"/>
           </a:p>
@@ -3316,7 +3316,7 @@
           <a:p>
             <a:fld id="{A5D3794B-289A-4A80-97D7-111025398D45}" type="datetimeFigureOut">
               <a:rPr lang="en-US" smtClean="0"/>
-              <a:t>4/24/2026</a:t>
+              <a:t>4/25/2026</a:t>
             </a:fld>
             <a:endParaRPr lang="en-US" dirty="0"/>
           </a:p>
@@ -3624,7 +3624,7 @@
           <a:p>
             <a:fld id="{5A61015F-7CC6-4D0A-9D87-873EA4C304CC}" type="datetimeFigureOut">
               <a:rPr lang="en-US" smtClean="0"/>
-              <a:t>4/24/2026</a:t>
+              <a:t>4/25/2026</a:t>
             </a:fld>
             <a:endParaRPr lang="en-US" dirty="0"/>
           </a:p>
@@ -3927,7 +3927,7 @@
           <a:p>
             <a:fld id="{93C6A301-0538-44EC-B09D-202E1042A48B}" type="datetimeFigureOut">
               <a:rPr lang="en-US" smtClean="0"/>
-              <a:t>4/24/2026</a:t>
+              <a:t>4/25/2026</a:t>
             </a:fld>
             <a:endParaRPr lang="en-US" dirty="0"/>
           </a:p>
@@ -4350,7 +4350,7 @@
           <a:p>
             <a:fld id="{D789574A-8875-45EF-8EA2-3CAA0F7ABC4C}" type="datetimeFigureOut">
               <a:rPr lang="en-US" smtClean="0"/>
-              <a:t>4/24/2026</a:t>
+              <a:t>4/25/2026</a:t>
             </a:fld>
             <a:endParaRPr lang="en-US" dirty="0"/>
           </a:p>
@@ -4446,7 +4446,7 @@
           <a:p>
             <a:fld id="{67EF4D4C-5367-4C26-9E2B-D8088D7FCA81}" type="datetimeFigureOut">
               <a:rPr lang="en-US" smtClean="0"/>
-              <a:t>4/24/2026</a:t>
+              <a:t>4/25/2026</a:t>
             </a:fld>
             <a:endParaRPr lang="en-US" dirty="0"/>
           </a:p>
@@ -4616,7 +4616,7 @@
           <a:p>
             <a:fld id="{56E91E96-98B0-4413-9547-46F3504108EF}" type="datetimeFigureOut">
               <a:rPr lang="en-US" smtClean="0"/>
-              <a:t>4/24/2026</a:t>
+              <a:t>4/25/2026</a:t>
             </a:fld>
             <a:endParaRPr lang="en-US" dirty="0"/>
           </a:p>
@@ -4995,7 +4995,7 @@
           <a:p>
             <a:fld id="{05C68B11-C5A8-448C-8CE9-B1A273C79CFC}" type="datetimeFigureOut">
               <a:rPr lang="en-US" smtClean="0"/>
-              <a:t>4/24/2026</a:t>
+              <a:t>4/25/2026</a:t>
             </a:fld>
             <a:endParaRPr lang="en-US" dirty="0"/>
           </a:p>
@@ -5285,7 +5285,7 @@
           <a:p>
             <a:fld id="{C7616CA0-919D-4A49-9C8A-62FDFB3A5183}" type="datetimeFigureOut">
               <a:rPr lang="en-US" smtClean="0"/>
-              <a:t>4/24/2026</a:t>
+              <a:t>4/25/2026</a:t>
             </a:fld>
             <a:endParaRPr lang="en-US" dirty="0"/>
           </a:p>
@@ -5498,7 +5498,7 @@
             <a:fld id="{90298CD5-6C1E-4009-B41F-6DF62E31D3BE}" type="datetimeFigureOut">
               <a:rPr lang="en-US" smtClean="0"/>
               <a:pPr/>
-              <a:t>4/24/2026</a:t>
+              <a:t>4/25/2026</a:t>
             </a:fld>
             <a:endParaRPr lang="en-US" dirty="0"/>
           </a:p>
@@ -11880,7 +11880,7 @@
         </p:nvSpPr>
         <p:spPr>
           <a:xfrm>
-            <a:off x="7436063" y="4619029"/>
+            <a:off x="7436063" y="4627655"/>
             <a:ext cx="689612" cy="307777"/>
           </a:xfrm>
           <a:prstGeom prst="rect">
@@ -12538,7 +12538,10 @@
             <a:avLst/>
           </a:prstGeom>
           <a:solidFill>
-            <a:srgbClr val="8C9BAF"/>
+            <a:schemeClr val="accent3">
+              <a:lumMod val="40000"/>
+              <a:lumOff val="60000"/>
+            </a:schemeClr>
           </a:solidFill>
           <a:ln>
             <a:noFill/>
@@ -12582,8 +12585,8 @@
         </p:nvSpPr>
         <p:spPr>
           <a:xfrm>
-            <a:off x="10645310" y="4163138"/>
-            <a:ext cx="788999" cy="307777"/>
+            <a:off x="10878220" y="4180390"/>
+            <a:ext cx="702436" cy="276999"/>
           </a:xfrm>
           <a:prstGeom prst="rect">
             <a:avLst/>
@@ -12604,11 +12607,11 @@
               </a:defRPr>
             </a:pPr>
             <a:r>
-              <a:rPr lang="en-US" sz="1400" dirty="0"/>
+              <a:rPr lang="en-US" sz="1200" dirty="0"/>
               <a:t>940.3</a:t>
             </a:r>
             <a:r>
-              <a:rPr sz="1400" dirty="0"/>
+              <a:rPr sz="1200" dirty="0"/>
               <a:t>M</a:t>
             </a:r>
           </a:p>
@@ -12812,13 +12815,15 @@
         <p:spPr>
           <a:xfrm>
             <a:off x="10026286" y="4679684"/>
-            <a:ext cx="641160" cy="246405"/>
+            <a:ext cx="976008" cy="246405"/>
           </a:xfrm>
           <a:prstGeom prst="rect">
             <a:avLst/>
           </a:prstGeom>
           <a:solidFill>
-            <a:srgbClr val="8C9BAF"/>
+            <a:schemeClr val="accent3">
+              <a:lumMod val="75000"/>
+            </a:schemeClr>
           </a:solidFill>
           <a:ln>
             <a:noFill/>
@@ -12862,8 +12867,8 @@
         </p:nvSpPr>
         <p:spPr>
           <a:xfrm>
-            <a:off x="10662401" y="4633107"/>
-            <a:ext cx="936475" cy="307777"/>
+            <a:off x="10903937" y="4658985"/>
+            <a:ext cx="829073" cy="276999"/>
           </a:xfrm>
           <a:prstGeom prst="rect">
             <a:avLst/>
@@ -12884,16 +12889,131 @@
               </a:defRPr>
             </a:pPr>
             <a:r>
-              <a:rPr lang="en-US" sz="1400" dirty="0"/>
+              <a:rPr lang="en-US" sz="1200" dirty="0"/>
               <a:t>1,309.5</a:t>
             </a:r>
             <a:r>
-              <a:rPr sz="1400" dirty="0"/>
+              <a:rPr sz="1200" dirty="0"/>
               <a:t>M</a:t>
             </a:r>
           </a:p>
         </p:txBody>
       </p:sp>
+      <p:sp>
+        <p:nvSpPr>
+          <p:cNvPr id="73" name="TextBox 72">
+            <a:extLst>
+              <a:ext uri="{FF2B5EF4-FFF2-40B4-BE49-F238E27FC236}">
+                <a16:creationId xmlns:a16="http://schemas.microsoft.com/office/drawing/2014/main" id="{400BF9C7-8F27-C123-BF93-7A3D0D0A51BF}"/>
+              </a:ext>
+            </a:extLst>
+          </p:cNvPr>
+          <p:cNvSpPr txBox="1"/>
+          <p:nvPr/>
+        </p:nvSpPr>
+        <p:spPr>
+          <a:xfrm>
+            <a:off x="10225537" y="5000118"/>
+            <a:ext cx="1178528" cy="461665"/>
+          </a:xfrm>
+          <a:prstGeom prst="rect">
+            <a:avLst/>
+          </a:prstGeom>
+          <a:noFill/>
+        </p:spPr>
+        <p:txBody>
+          <a:bodyPr wrap="square">
+            <a:spAutoFit/>
+          </a:bodyPr>
+          <a:lstStyle/>
+          <a:p>
+            <a:pPr algn="ctr">
+              <a:defRPr sz="2200" b="1">
+                <a:solidFill>
+                  <a:srgbClr val="EB8737"/>
+                </a:solidFill>
+              </a:defRPr>
+            </a:pPr>
+            <a:r>
+              <a:rPr sz="2400" dirty="0">
+                <a:solidFill>
+                  <a:schemeClr val="tx1">
+                    <a:lumMod val="75000"/>
+                    <a:lumOff val="25000"/>
+                  </a:schemeClr>
+                </a:solidFill>
+              </a:rPr>
+              <a:t>+</a:t>
+            </a:r>
+            <a:r>
+              <a:rPr lang="en-US" sz="2400" dirty="0">
+                <a:solidFill>
+                  <a:schemeClr val="tx1">
+                    <a:lumMod val="75000"/>
+                    <a:lumOff val="25000"/>
+                  </a:schemeClr>
+                </a:solidFill>
+              </a:rPr>
+              <a:t>39.3</a:t>
+            </a:r>
+            <a:r>
+              <a:rPr sz="2400" dirty="0">
+                <a:solidFill>
+                  <a:schemeClr val="tx1">
+                    <a:lumMod val="75000"/>
+                    <a:lumOff val="25000"/>
+                  </a:schemeClr>
+                </a:solidFill>
+              </a:rPr>
+              <a:t>%</a:t>
+            </a:r>
+          </a:p>
+        </p:txBody>
+      </p:sp>
+      <p:cxnSp>
+        <p:nvCxnSpPr>
+          <p:cNvPr id="75" name="Straight Arrow Connector 74">
+            <a:extLst>
+              <a:ext uri="{FF2B5EF4-FFF2-40B4-BE49-F238E27FC236}">
+                <a16:creationId xmlns:a16="http://schemas.microsoft.com/office/drawing/2014/main" id="{70BA100C-D263-F3E2-0534-89D82BABDDE8}"/>
+              </a:ext>
+            </a:extLst>
+          </p:cNvPr>
+          <p:cNvCxnSpPr>
+            <a:cxnSpLocks/>
+          </p:cNvCxnSpPr>
+          <p:nvPr/>
+        </p:nvCxnSpPr>
+        <p:spPr>
+          <a:xfrm flipV="1">
+            <a:off x="11386761" y="5098213"/>
+            <a:ext cx="0" cy="224286"/>
+          </a:xfrm>
+          <a:prstGeom prst="straightConnector1">
+            <a:avLst/>
+          </a:prstGeom>
+          <a:ln w="28575">
+            <a:solidFill>
+              <a:srgbClr val="00B050"/>
+            </a:solidFill>
+            <a:tailEnd type="triangle"/>
+          </a:ln>
+        </p:spPr>
+        <p:style>
+          <a:lnRef idx="1">
+            <a:schemeClr val="accent1"/>
+          </a:lnRef>
+          <a:fillRef idx="0">
+            <a:schemeClr val="accent1"/>
+          </a:fillRef>
+          <a:effectRef idx="0">
+            <a:schemeClr val="accent1"/>
+          </a:effectRef>
+          <a:fontRef idx="minor">
+            <a:schemeClr val="tx1"/>
+          </a:fontRef>
+        </p:style>
+      </p:cxnSp>
     </p:spTree>
     <p:extLst>
       <p:ext uri="{BB962C8B-B14F-4D97-AF65-F5344CB8AC3E}">
